--- a/decks/Day 1/Day1-Claude-Code-Track.pptx
+++ b/decks/Day 1/Day1-Claude-Code-Track.pptx
@@ -646,7 +646,7 @@
           <p:nvPr/>
         </p:nvPicPr>
         <p:blipFill>
-          <a:blip r:embed="rId3"/>
+          <a:blip r:embed="rId2"/>
           <a:stretch>
             <a:fillRect/>
           </a:stretch>
@@ -844,45 +844,6 @@
               <a:t>dotnetclaude.com</a:t>
             </a:r>
             <a:endParaRPr lang="en-US" sz="1600" dirty="0"/>
-          </a:p>
-        </p:txBody>
-      </p:sp>
-      <p:sp>
-        <p:nvSpPr>
-          <p:cNvPr id="10" name="Text 7"/>
-          <p:cNvSpPr/>
-          <p:nvPr/>
-        </p:nvSpPr>
-        <p:spPr>
-          <a:xfrm>
-            <a:off x="640080" y="4443984"/>
-            <a:ext cx="8046720" cy="292608"/>
-          </a:xfrm>
-          <a:prstGeom prst="rect">
-            <a:avLst/>
-          </a:prstGeom>
-          <a:noFill/>
-          <a:ln/>
-        </p:spPr>
-        <p:txBody>
-          <a:bodyPr wrap="square" lIns="0" tIns="0" rIns="0" bIns="0" rtlCol="0" anchor="ctr"/>
-          <a:lstStyle/>
-          <a:p>
-            <a:pPr marL="0" indent="0">
-              <a:buNone/>
-            </a:pPr>
-            <a:r>
-              <a:rPr lang="en-US" sz="1000" i="1" dirty="0">
-                <a:solidFill>
-                  <a:srgbClr val="615C52"/>
-                </a:solidFill>
-                <a:latin typeface="Inter" pitchFamily="34" charset="0"/>
-                <a:ea typeface="Inter" pitchFamily="34" charset="-122"/>
-                <a:cs typeface="Inter" pitchFamily="34" charset="-120"/>
-              </a:rPr>
-              <a:t>Instructor-led workshop for professional .NET developers</a:t>
-            </a:r>
-            <a:endParaRPr lang="en-US" sz="1000" dirty="0"/>
           </a:p>
         </p:txBody>
       </p:sp>
@@ -1074,7 +1035,7 @@
           <p:nvPr/>
         </p:nvPicPr>
         <p:blipFill>
-          <a:blip r:embed="rId3"/>
+          <a:blip r:embed="rId2"/>
           <a:stretch>
             <a:fillRect/>
           </a:stretch>
@@ -1283,7 +1244,7 @@
           <p:nvPr/>
         </p:nvPicPr>
         <p:blipFill>
-          <a:blip r:embed="rId4"/>
+          <a:blip r:embed="rId3"/>
           <a:stretch>
             <a:fillRect/>
           </a:stretch>
@@ -1492,7 +1453,7 @@
           <p:nvPr/>
         </p:nvPicPr>
         <p:blipFill>
-          <a:blip r:embed="rId5"/>
+          <a:blip r:embed="rId4"/>
           <a:stretch>
             <a:fillRect/>
           </a:stretch>
@@ -1699,45 +1660,6 @@
               <a:t>Day 1  ·  10/10</a:t>
             </a:r>
             <a:endParaRPr lang="en-US" sz="900" dirty="0"/>
-          </a:p>
-        </p:txBody>
-      </p:sp>
-      <p:sp>
-        <p:nvSpPr>
-          <p:cNvPr id="24" name="Text 19"/>
-          <p:cNvSpPr/>
-          <p:nvPr/>
-        </p:nvSpPr>
-        <p:spPr>
-          <a:xfrm>
-            <a:off x="548640" y="4443984"/>
-            <a:ext cx="8046720" cy="292608"/>
-          </a:xfrm>
-          <a:prstGeom prst="rect">
-            <a:avLst/>
-          </a:prstGeom>
-          <a:noFill/>
-          <a:ln/>
-        </p:spPr>
-        <p:txBody>
-          <a:bodyPr wrap="square" lIns="0" tIns="0" rIns="0" bIns="0" rtlCol="0" anchor="ctr"/>
-          <a:lstStyle/>
-          <a:p>
-            <a:pPr marL="0" indent="0">
-              <a:buNone/>
-            </a:pPr>
-            <a:r>
-              <a:rPr lang="en-US" sz="1000" i="1" dirty="0">
-                <a:solidFill>
-                  <a:srgbClr val="615C52"/>
-                </a:solidFill>
-                <a:latin typeface="Inter" pitchFamily="34" charset="0"/>
-                <a:ea typeface="Inter" pitchFamily="34" charset="-122"/>
-                <a:cs typeface="Inter" pitchFamily="34" charset="-120"/>
-              </a:rPr>
-              <a:t>▸ Deck reinforces, docs carry the detail — reference cards are the part to keep.</a:t>
-            </a:r>
-            <a:endParaRPr lang="en-US" sz="1000" dirty="0"/>
           </a:p>
         </p:txBody>
       </p:sp>
@@ -1888,7 +1810,7 @@
           <p:nvPr/>
         </p:nvPicPr>
         <p:blipFill>
-          <a:blip r:embed="rId3"/>
+          <a:blip r:embed="rId2"/>
           <a:stretch>
             <a:fillRect/>
           </a:stretch>
@@ -2128,45 +2050,6 @@
               <a:t>Day 1  ·  2/10</a:t>
             </a:r>
             <a:endParaRPr lang="en-US" sz="900" dirty="0"/>
-          </a:p>
-        </p:txBody>
-      </p:sp>
-      <p:sp>
-        <p:nvSpPr>
-          <p:cNvPr id="11" name="Text 8"/>
-          <p:cNvSpPr/>
-          <p:nvPr/>
-        </p:nvSpPr>
-        <p:spPr>
-          <a:xfrm>
-            <a:off x="548640" y="4443984"/>
-            <a:ext cx="8046720" cy="292608"/>
-          </a:xfrm>
-          <a:prstGeom prst="rect">
-            <a:avLst/>
-          </a:prstGeom>
-          <a:noFill/>
-          <a:ln/>
-        </p:spPr>
-        <p:txBody>
-          <a:bodyPr wrap="square" lIns="0" tIns="0" rIns="0" bIns="0" rtlCol="0" anchor="ctr"/>
-          <a:lstStyle/>
-          <a:p>
-            <a:pPr marL="0" indent="0">
-              <a:buNone/>
-            </a:pPr>
-            <a:r>
-              <a:rPr lang="en-US" sz="1000" i="1" dirty="0">
-                <a:solidFill>
-                  <a:srgbClr val="615C52"/>
-                </a:solidFill>
-                <a:latin typeface="Inter" pitchFamily="34" charset="0"/>
-                <a:ea typeface="Inter" pitchFamily="34" charset="-122"/>
-                <a:cs typeface="Inter" pitchFamily="34" charset="-120"/>
-              </a:rPr>
-              <a:t>▸ Set the tone: this is about habit change, not a feature tour.</a:t>
-            </a:r>
-            <a:endParaRPr lang="en-US" sz="1000" dirty="0"/>
           </a:p>
         </p:txBody>
       </p:sp>
@@ -3928,45 +3811,6 @@
           </a:p>
         </p:txBody>
       </p:sp>
-      <p:sp>
-        <p:nvSpPr>
-          <p:cNvPr id="7" name="Text 4"/>
-          <p:cNvSpPr/>
-          <p:nvPr/>
-        </p:nvSpPr>
-        <p:spPr>
-          <a:xfrm>
-            <a:off x="548640" y="4443984"/>
-            <a:ext cx="8046720" cy="292608"/>
-          </a:xfrm>
-          <a:prstGeom prst="rect">
-            <a:avLst/>
-          </a:prstGeom>
-          <a:noFill/>
-          <a:ln/>
-        </p:spPr>
-        <p:txBody>
-          <a:bodyPr wrap="square" lIns="0" tIns="0" rIns="0" bIns="0" rtlCol="0" anchor="ctr"/>
-          <a:lstStyle/>
-          <a:p>
-            <a:pPr marL="0" indent="0">
-              <a:buNone/>
-            </a:pPr>
-            <a:r>
-              <a:rPr lang="en-US" sz="1000" i="1" dirty="0">
-                <a:solidFill>
-                  <a:srgbClr val="615C52"/>
-                </a:solidFill>
-                <a:latin typeface="Inter" pitchFamily="34" charset="0"/>
-                <a:ea typeface="Inter" pitchFamily="34" charset="-122"/>
-                <a:cs typeface="Inter" pitchFamily="34" charset="-120"/>
-              </a:rPr>
-              <a:t>▸ Four teaching blocks, two breaks, lunch — labs after every section past Foundations.</a:t>
-            </a:r>
-            <a:endParaRPr lang="en-US" sz="1000" dirty="0"/>
-          </a:p>
-        </p:txBody>
-      </p:sp>
     </p:spTree>
   </p:cSld>
   <p:clrMapOvr>
@@ -4094,7 +3938,7 @@
         </p:nvGraphicFramePr>
         <p:xfrm>
           <a:off x="548640" y="1463040"/>
-          <a:ext cx="8046720" cy="914400"/>
+          <a:ext cx="8046720" cy="2743200"/>
         </p:xfrm>
         <a:graphic>
           <a:graphicData uri="http://schemas.openxmlformats.org/drawingml/2006/table">
@@ -4784,45 +4628,6 @@
           </a:p>
         </p:txBody>
       </p:sp>
-      <p:sp>
-        <p:nvSpPr>
-          <p:cNvPr id="7" name="Text 4"/>
-          <p:cNvSpPr/>
-          <p:nvPr/>
-        </p:nvSpPr>
-        <p:spPr>
-          <a:xfrm>
-            <a:off x="548640" y="4443984"/>
-            <a:ext cx="8046720" cy="292608"/>
-          </a:xfrm>
-          <a:prstGeom prst="rect">
-            <a:avLst/>
-          </a:prstGeom>
-          <a:noFill/>
-          <a:ln/>
-        </p:spPr>
-        <p:txBody>
-          <a:bodyPr wrap="square" lIns="0" tIns="0" rIns="0" bIns="0" rtlCol="0" anchor="ctr"/>
-          <a:lstStyle/>
-          <a:p>
-            <a:pPr marL="0" indent="0">
-              <a:buNone/>
-            </a:pPr>
-            <a:r>
-              <a:rPr lang="en-US" sz="1000" i="1" dirty="0">
-                <a:solidFill>
-                  <a:srgbClr val="615C52"/>
-                </a:solidFill>
-                <a:latin typeface="Inter" pitchFamily="34" charset="0"/>
-                <a:ea typeface="Inter" pitchFamily="34" charset="-122"/>
-                <a:cs typeface="Inter" pitchFamily="34" charset="-120"/>
-              </a:rPr>
-              <a:t>▸ Three outcomes: operate the tool, apply it across the SDLC, and reason about the model.</a:t>
-            </a:r>
-            <a:endParaRPr lang="en-US" sz="1000" dirty="0"/>
-          </a:p>
-        </p:txBody>
-      </p:sp>
     </p:spTree>
   </p:cSld>
   <p:clrMapOvr>
@@ -4999,7 +4804,7 @@
           <p:nvPr/>
         </p:nvPicPr>
         <p:blipFill>
-          <a:blip r:embed="rId3"/>
+          <a:blip r:embed="rId2"/>
           <a:stretch>
             <a:fillRect/>
           </a:stretch>
@@ -5080,7 +4885,7 @@
         </p:nvGraphicFramePr>
         <p:xfrm>
           <a:off x="548640" y="2286000"/>
-          <a:ext cx="8046720" cy="914400"/>
+          <a:ext cx="8046720" cy="1737360"/>
         </p:xfrm>
         <a:graphic>
           <a:graphicData uri="http://schemas.openxmlformats.org/drawingml/2006/table">
@@ -5951,45 +5756,6 @@
           </a:p>
         </p:txBody>
       </p:sp>
-      <p:sp>
-        <p:nvSpPr>
-          <p:cNvPr id="11" name="Text 7"/>
-          <p:cNvSpPr/>
-          <p:nvPr/>
-        </p:nvSpPr>
-        <p:spPr>
-          <a:xfrm>
-            <a:off x="548640" y="4443984"/>
-            <a:ext cx="8046720" cy="292608"/>
-          </a:xfrm>
-          <a:prstGeom prst="rect">
-            <a:avLst/>
-          </a:prstGeom>
-          <a:noFill/>
-          <a:ln/>
-        </p:spPr>
-        <p:txBody>
-          <a:bodyPr wrap="square" lIns="0" tIns="0" rIns="0" bIns="0" rtlCol="0" anchor="ctr"/>
-          <a:lstStyle/>
-          <a:p>
-            <a:pPr marL="0" indent="0">
-              <a:buNone/>
-            </a:pPr>
-            <a:r>
-              <a:rPr lang="en-US" sz="1000" i="1" dirty="0">
-                <a:solidFill>
-                  <a:srgbClr val="615C52"/>
-                </a:solidFill>
-                <a:latin typeface="Inter" pitchFamily="34" charset="0"/>
-                <a:ea typeface="Inter" pitchFamily="34" charset="-122"/>
-                <a:cs typeface="Inter" pitchFamily="34" charset="-120"/>
-              </a:rPr>
-              <a:t>▸ Confirm everyone has Pro, Max, or an API key before the first lab.</a:t>
-            </a:r>
-            <a:endParaRPr lang="en-US" sz="1000" dirty="0"/>
-          </a:p>
-        </p:txBody>
-      </p:sp>
     </p:spTree>
   </p:cSld>
   <p:clrMapOvr>
@@ -6171,7 +5937,7 @@
           <p:nvPr/>
         </p:nvPicPr>
         <p:blipFill>
-          <a:blip r:embed="rId3"/>
+          <a:blip r:embed="rId2"/>
           <a:stretch>
             <a:fillRect/>
           </a:stretch>
@@ -6334,7 +6100,7 @@
           <p:nvPr/>
         </p:nvPicPr>
         <p:blipFill>
-          <a:blip r:embed="rId4"/>
+          <a:blip r:embed="rId3"/>
           <a:stretch>
             <a:fillRect/>
           </a:stretch>
@@ -6497,7 +6263,7 @@
           <p:nvPr/>
         </p:nvPicPr>
         <p:blipFill>
-          <a:blip r:embed="rId5"/>
+          <a:blip r:embed="rId4"/>
           <a:stretch>
             <a:fillRect/>
           </a:stretch>
@@ -6660,7 +6426,7 @@
           <p:nvPr/>
         </p:nvPicPr>
         <p:blipFill>
-          <a:blip r:embed="rId6"/>
+          <a:blip r:embed="rId5"/>
           <a:stretch>
             <a:fillRect/>
           </a:stretch>
@@ -6823,7 +6589,7 @@
           <p:nvPr/>
         </p:nvPicPr>
         <p:blipFill>
-          <a:blip r:embed="rId7"/>
+          <a:blip r:embed="rId6"/>
           <a:stretch>
             <a:fillRect/>
           </a:stretch>
@@ -6991,45 +6757,6 @@
               <a:t>Day 1  ·  6/10</a:t>
             </a:r>
             <a:endParaRPr lang="en-US" sz="900" dirty="0"/>
-          </a:p>
-        </p:txBody>
-      </p:sp>
-      <p:sp>
-        <p:nvSpPr>
-          <p:cNvPr id="31" name="Text 24"/>
-          <p:cNvSpPr/>
-          <p:nvPr/>
-        </p:nvSpPr>
-        <p:spPr>
-          <a:xfrm>
-            <a:off x="548640" y="4443984"/>
-            <a:ext cx="8046720" cy="292608"/>
-          </a:xfrm>
-          <a:prstGeom prst="rect">
-            <a:avLst/>
-          </a:prstGeom>
-          <a:noFill/>
-          <a:ln/>
-        </p:spPr>
-        <p:txBody>
-          <a:bodyPr wrap="square" lIns="0" tIns="0" rIns="0" bIns="0" rtlCol="0" anchor="ctr"/>
-          <a:lstStyle/>
-          <a:p>
-            <a:pPr marL="0" indent="0">
-              <a:buNone/>
-            </a:pPr>
-            <a:r>
-              <a:rPr lang="en-US" sz="1000" i="1" dirty="0">
-                <a:solidFill>
-                  <a:srgbClr val="615C52"/>
-                </a:solidFill>
-                <a:latin typeface="Inter" pitchFamily="34" charset="0"/>
-                <a:ea typeface="Inter" pitchFamily="34" charset="-122"/>
-                <a:cs typeface="Inter" pitchFamily="34" charset="-120"/>
-              </a:rPr>
-              <a:t>▸ Windows users: do everything inside WSL2 — it avoids most path and shell snags.</a:t>
-            </a:r>
-            <a:endParaRPr lang="en-US" sz="1000" dirty="0"/>
           </a:p>
         </p:txBody>
       </p:sp>
@@ -7592,45 +7319,6 @@
           </a:p>
         </p:txBody>
       </p:sp>
-      <p:sp>
-        <p:nvSpPr>
-          <p:cNvPr id="12" name="Text 10"/>
-          <p:cNvSpPr/>
-          <p:nvPr/>
-        </p:nvSpPr>
-        <p:spPr>
-          <a:xfrm>
-            <a:off x="548640" y="4443984"/>
-            <a:ext cx="8046720" cy="292608"/>
-          </a:xfrm>
-          <a:prstGeom prst="rect">
-            <a:avLst/>
-          </a:prstGeom>
-          <a:noFill/>
-          <a:ln/>
-        </p:spPr>
-        <p:txBody>
-          <a:bodyPr wrap="square" lIns="0" tIns="0" rIns="0" bIns="0" rtlCol="0" anchor="ctr"/>
-          <a:lstStyle/>
-          <a:p>
-            <a:pPr marL="0" indent="0">
-              <a:buNone/>
-            </a:pPr>
-            <a:r>
-              <a:rPr lang="en-US" sz="1000" i="1" dirty="0">
-                <a:solidFill>
-                  <a:srgbClr val="615C52"/>
-                </a:solidFill>
-                <a:latin typeface="Inter" pitchFamily="34" charset="0"/>
-                <a:ea typeface="Inter" pitchFamily="34" charset="-122"/>
-                <a:cs typeface="Inter" pitchFamily="34" charset="-120"/>
-              </a:rPr>
-              <a:t>▸ Run these live; pause on the OAuth handoff so everyone authenticates together.</a:t>
-            </a:r>
-            <a:endParaRPr lang="en-US" sz="1000" dirty="0"/>
-          </a:p>
-        </p:txBody>
-      </p:sp>
     </p:spTree>
   </p:cSld>
   <p:clrMapOvr>
@@ -7778,7 +7466,7 @@
           <p:nvPr/>
         </p:nvPicPr>
         <p:blipFill>
-          <a:blip r:embed="rId3"/>
+          <a:blip r:embed="rId2"/>
           <a:stretch>
             <a:fillRect/>
           </a:stretch>
@@ -8550,45 +8238,6 @@
               <a:t>Day 1  ·  8/10</a:t>
             </a:r>
             <a:endParaRPr lang="en-US" sz="900" dirty="0"/>
-          </a:p>
-        </p:txBody>
-      </p:sp>
-      <p:sp>
-        <p:nvSpPr>
-          <p:cNvPr id="25" name="Text 22"/>
-          <p:cNvSpPr/>
-          <p:nvPr/>
-        </p:nvSpPr>
-        <p:spPr>
-          <a:xfrm>
-            <a:off x="548640" y="4443984"/>
-            <a:ext cx="8046720" cy="292608"/>
-          </a:xfrm>
-          <a:prstGeom prst="rect">
-            <a:avLst/>
-          </a:prstGeom>
-          <a:noFill/>
-          <a:ln/>
-        </p:spPr>
-        <p:txBody>
-          <a:bodyPr wrap="square" lIns="0" tIns="0" rIns="0" bIns="0" rtlCol="0" anchor="ctr"/>
-          <a:lstStyle/>
-          <a:p>
-            <a:pPr marL="0" indent="0">
-              <a:buNone/>
-            </a:pPr>
-            <a:r>
-              <a:rPr lang="en-US" sz="1000" i="1" dirty="0">
-                <a:solidFill>
-                  <a:srgbClr val="615C52"/>
-                </a:solidFill>
-                <a:latin typeface="Inter" pitchFamily="34" charset="0"/>
-                <a:ea typeface="Inter" pitchFamily="34" charset="-122"/>
-                <a:cs typeface="Inter" pitchFamily="34" charset="-120"/>
-              </a:rPr>
-              <a:t>▸ One repo, four labs — improvements compound instead of resetting each section.</a:t>
-            </a:r>
-            <a:endParaRPr lang="en-US" sz="1000" dirty="0"/>
           </a:p>
         </p:txBody>
       </p:sp>
@@ -9404,45 +9053,6 @@
               <a:t>Day 1  ·  9/10</a:t>
             </a:r>
             <a:endParaRPr lang="en-US" sz="900" dirty="0"/>
-          </a:p>
-        </p:txBody>
-      </p:sp>
-      <p:sp>
-        <p:nvSpPr>
-          <p:cNvPr id="21" name="Text 19"/>
-          <p:cNvSpPr/>
-          <p:nvPr/>
-        </p:nvSpPr>
-        <p:spPr>
-          <a:xfrm>
-            <a:off x="548640" y="4443984"/>
-            <a:ext cx="8046720" cy="292608"/>
-          </a:xfrm>
-          <a:prstGeom prst="rect">
-            <a:avLst/>
-          </a:prstGeom>
-          <a:noFill/>
-          <a:ln/>
-        </p:spPr>
-        <p:txBody>
-          <a:bodyPr wrap="square" lIns="0" tIns="0" rIns="0" bIns="0" rtlCol="0" anchor="ctr"/>
-          <a:lstStyle/>
-          <a:p>
-            <a:pPr marL="0" indent="0">
-              <a:buNone/>
-            </a:pPr>
-            <a:r>
-              <a:rPr lang="en-US" sz="1000" i="1" dirty="0">
-                <a:solidFill>
-                  <a:srgbClr val="615C52"/>
-                </a:solidFill>
-                <a:latin typeface="Inter" pitchFamily="34" charset="0"/>
-                <a:ea typeface="Inter" pitchFamily="34" charset="-122"/>
-                <a:cs typeface="Inter" pitchFamily="34" charset="-120"/>
-              </a:rPr>
-              <a:t>▸ Four projects plus a deliberately thin CLAUDE.md you'll enrich section by section.</a:t>
-            </a:r>
-            <a:endParaRPr lang="en-US" sz="1000" dirty="0"/>
           </a:p>
         </p:txBody>
       </p:sp>

--- a/decks/Day 1/Day1-Claude-Code-Track.pptx
+++ b/decks/Day 1/Day1-Claude-Code-Track.pptx
@@ -244,6 +244,846 @@
     </a:lvl9pPr>
   </p:notesStyle>
 </p:notesMaster>
+</file>
+
+<file path=ppt/notesSlides/notesSlide1.xml><?xml version="1.0" encoding="utf-8"?>
+<p:notes xmlns:a="http://schemas.openxmlformats.org/drawingml/2006/main" xmlns:r="http://schemas.openxmlformats.org/officeDocument/2006/relationships" xmlns:p="http://schemas.openxmlformats.org/presentationml/2006/main">
+  <p:cSld>
+    <p:spTree>
+      <p:nvGrpSpPr>
+        <p:cNvPr id="1" name=""/>
+        <p:cNvGrpSpPr/>
+        <p:nvPr/>
+      </p:nvGrpSpPr>
+      <p:grpSpPr>
+        <a:xfrm>
+          <a:off x="0" y="0"/>
+          <a:ext cx="0" cy="0"/>
+          <a:chOff x="0" y="0"/>
+          <a:chExt cx="0" cy="0"/>
+        </a:xfrm>
+      </p:grpSpPr>
+      <p:sp>
+        <p:nvSpPr>
+          <p:cNvPr id="2" name="Slide Image Placeholder 1"/>
+          <p:cNvSpPr>
+            <a:spLocks noGrp="1" noRot="1" noChangeAspect="1"/>
+          </p:cNvSpPr>
+          <p:nvPr>
+            <p:ph type="sldImg"/>
+          </p:nvPr>
+        </p:nvSpPr>
+        <p:spPr/>
+      </p:sp>
+      <p:sp>
+        <p:nvSpPr>
+          <p:cNvPr id="3" name="Notes Placeholder 2"/>
+          <p:cNvSpPr>
+            <a:spLocks noGrp="1"/>
+          </p:cNvSpPr>
+          <p:nvPr>
+            <p:ph type="body" idx="1"/>
+          </p:nvPr>
+        </p:nvSpPr>
+        <p:spPr/>
+        <p:txBody>
+          <a:bodyPr/>
+          <a:lstStyle/>
+          <a:p>
+            <a:endParaRPr lang="en-US" dirty="0"/>
+          </a:p>
+        </p:txBody>
+      </p:sp>
+      <p:sp>
+        <p:nvSpPr>
+          <p:cNvPr id="4" name="Slide Number Placeholder 3"/>
+          <p:cNvSpPr>
+            <a:spLocks noGrp="1"/>
+          </p:cNvSpPr>
+          <p:nvPr>
+            <p:ph type="sldNum" sz="quarter" idx="10"/>
+          </p:nvPr>
+        </p:nvSpPr>
+        <p:spPr/>
+        <p:txBody>
+          <a:bodyPr/>
+          <a:lstStyle/>
+          <a:p>
+            <a:fld id="{F7021451-1387-4CA6-816F-3879F97B5CBC}" type="slidenum">
+              <a:rPr lang="en-US"/>
+              <a:t>1</a:t>
+            </a:fld>
+            <a:endParaRPr lang="en-US"/>
+          </a:p>
+        </p:txBody>
+      </p:sp>
+    </p:spTree>
+    <p:extLst>
+      <p:ext uri="{BB962C8B-B14F-4D97-AF65-F5344CB8AC3E}">
+        <p14:creationId xmlns:p14="http://schemas.microsoft.com/office/powerpoint/2010/main" val="1024086991"/>
+      </p:ext>
+    </p:extLst>
+  </p:cSld>
+  <p:clrMapOvr>
+    <a:masterClrMapping/>
+  </p:clrMapOvr>
+</p:notes>
+</file>
+
+<file path=ppt/notesSlides/notesSlide10.xml><?xml version="1.0" encoding="utf-8"?>
+<p:notes xmlns:a="http://schemas.openxmlformats.org/drawingml/2006/main" xmlns:r="http://schemas.openxmlformats.org/officeDocument/2006/relationships" xmlns:p="http://schemas.openxmlformats.org/presentationml/2006/main">
+  <p:cSld>
+    <p:spTree>
+      <p:nvGrpSpPr>
+        <p:cNvPr id="1" name=""/>
+        <p:cNvGrpSpPr/>
+        <p:nvPr/>
+      </p:nvGrpSpPr>
+      <p:grpSpPr>
+        <a:xfrm>
+          <a:off x="0" y="0"/>
+          <a:ext cx="0" cy="0"/>
+          <a:chOff x="0" y="0"/>
+          <a:chExt cx="0" cy="0"/>
+        </a:xfrm>
+      </p:grpSpPr>
+      <p:sp>
+        <p:nvSpPr>
+          <p:cNvPr id="2" name="Slide Image Placeholder 1"/>
+          <p:cNvSpPr>
+            <a:spLocks noGrp="1" noRot="1" noChangeAspect="1"/>
+          </p:cNvSpPr>
+          <p:nvPr>
+            <p:ph type="sldImg"/>
+          </p:nvPr>
+        </p:nvSpPr>
+        <p:spPr/>
+      </p:sp>
+      <p:sp>
+        <p:nvSpPr>
+          <p:cNvPr id="3" name="Notes Placeholder 2"/>
+          <p:cNvSpPr>
+            <a:spLocks noGrp="1"/>
+          </p:cNvSpPr>
+          <p:nvPr>
+            <p:ph type="body" idx="1"/>
+          </p:nvPr>
+        </p:nvSpPr>
+        <p:spPr/>
+        <p:txBody>
+          <a:bodyPr/>
+          <a:lstStyle/>
+          <a:p>
+            <a:endParaRPr lang="en-US" dirty="0"/>
+          </a:p>
+        </p:txBody>
+      </p:sp>
+      <p:sp>
+        <p:nvSpPr>
+          <p:cNvPr id="4" name="Slide Number Placeholder 3"/>
+          <p:cNvSpPr>
+            <a:spLocks noGrp="1"/>
+          </p:cNvSpPr>
+          <p:nvPr>
+            <p:ph type="sldNum" sz="quarter" idx="10"/>
+          </p:nvPr>
+        </p:nvSpPr>
+        <p:spPr/>
+        <p:txBody>
+          <a:bodyPr/>
+          <a:lstStyle/>
+          <a:p>
+            <a:fld id="{F7021451-1387-4CA6-816F-3879F97B5CBC}" type="slidenum">
+              <a:rPr lang="en-US"/>
+              <a:t>10</a:t>
+            </a:fld>
+            <a:endParaRPr lang="en-US"/>
+          </a:p>
+        </p:txBody>
+      </p:sp>
+    </p:spTree>
+    <p:extLst>
+      <p:ext uri="{BB962C8B-B14F-4D97-AF65-F5344CB8AC3E}">
+        <p14:creationId xmlns:p14="http://schemas.microsoft.com/office/powerpoint/2010/main" val="1024086991"/>
+      </p:ext>
+    </p:extLst>
+  </p:cSld>
+  <p:clrMapOvr>
+    <a:masterClrMapping/>
+  </p:clrMapOvr>
+</p:notes>
+</file>
+
+<file path=ppt/notesSlides/notesSlide2.xml><?xml version="1.0" encoding="utf-8"?>
+<p:notes xmlns:a="http://schemas.openxmlformats.org/drawingml/2006/main" xmlns:r="http://schemas.openxmlformats.org/officeDocument/2006/relationships" xmlns:p="http://schemas.openxmlformats.org/presentationml/2006/main">
+  <p:cSld>
+    <p:spTree>
+      <p:nvGrpSpPr>
+        <p:cNvPr id="1" name=""/>
+        <p:cNvGrpSpPr/>
+        <p:nvPr/>
+      </p:nvGrpSpPr>
+      <p:grpSpPr>
+        <a:xfrm>
+          <a:off x="0" y="0"/>
+          <a:ext cx="0" cy="0"/>
+          <a:chOff x="0" y="0"/>
+          <a:chExt cx="0" cy="0"/>
+        </a:xfrm>
+      </p:grpSpPr>
+      <p:sp>
+        <p:nvSpPr>
+          <p:cNvPr id="2" name="Slide Image Placeholder 1"/>
+          <p:cNvSpPr>
+            <a:spLocks noGrp="1" noRot="1" noChangeAspect="1"/>
+          </p:cNvSpPr>
+          <p:nvPr>
+            <p:ph type="sldImg"/>
+          </p:nvPr>
+        </p:nvSpPr>
+        <p:spPr/>
+      </p:sp>
+      <p:sp>
+        <p:nvSpPr>
+          <p:cNvPr id="3" name="Notes Placeholder 2"/>
+          <p:cNvSpPr>
+            <a:spLocks noGrp="1"/>
+          </p:cNvSpPr>
+          <p:nvPr>
+            <p:ph type="body" idx="1"/>
+          </p:nvPr>
+        </p:nvSpPr>
+        <p:spPr/>
+        <p:txBody>
+          <a:bodyPr/>
+          <a:lstStyle/>
+          <a:p>
+            <a:endParaRPr lang="en-US" dirty="0"/>
+          </a:p>
+        </p:txBody>
+      </p:sp>
+      <p:sp>
+        <p:nvSpPr>
+          <p:cNvPr id="4" name="Slide Number Placeholder 3"/>
+          <p:cNvSpPr>
+            <a:spLocks noGrp="1"/>
+          </p:cNvSpPr>
+          <p:nvPr>
+            <p:ph type="sldNum" sz="quarter" idx="10"/>
+          </p:nvPr>
+        </p:nvSpPr>
+        <p:spPr/>
+        <p:txBody>
+          <a:bodyPr/>
+          <a:lstStyle/>
+          <a:p>
+            <a:fld id="{F7021451-1387-4CA6-816F-3879F97B5CBC}" type="slidenum">
+              <a:rPr lang="en-US"/>
+              <a:t>2</a:t>
+            </a:fld>
+            <a:endParaRPr lang="en-US"/>
+          </a:p>
+        </p:txBody>
+      </p:sp>
+    </p:spTree>
+    <p:extLst>
+      <p:ext uri="{BB962C8B-B14F-4D97-AF65-F5344CB8AC3E}">
+        <p14:creationId xmlns:p14="http://schemas.microsoft.com/office/powerpoint/2010/main" val="1024086991"/>
+      </p:ext>
+    </p:extLst>
+  </p:cSld>
+  <p:clrMapOvr>
+    <a:masterClrMapping/>
+  </p:clrMapOvr>
+</p:notes>
+</file>
+
+<file path=ppt/notesSlides/notesSlide3.xml><?xml version="1.0" encoding="utf-8"?>
+<p:notes xmlns:a="http://schemas.openxmlformats.org/drawingml/2006/main" xmlns:r="http://schemas.openxmlformats.org/officeDocument/2006/relationships" xmlns:p="http://schemas.openxmlformats.org/presentationml/2006/main">
+  <p:cSld>
+    <p:spTree>
+      <p:nvGrpSpPr>
+        <p:cNvPr id="1" name=""/>
+        <p:cNvGrpSpPr/>
+        <p:nvPr/>
+      </p:nvGrpSpPr>
+      <p:grpSpPr>
+        <a:xfrm>
+          <a:off x="0" y="0"/>
+          <a:ext cx="0" cy="0"/>
+          <a:chOff x="0" y="0"/>
+          <a:chExt cx="0" cy="0"/>
+        </a:xfrm>
+      </p:grpSpPr>
+      <p:sp>
+        <p:nvSpPr>
+          <p:cNvPr id="2" name="Slide Image Placeholder 1"/>
+          <p:cNvSpPr>
+            <a:spLocks noGrp="1" noRot="1" noChangeAspect="1"/>
+          </p:cNvSpPr>
+          <p:nvPr>
+            <p:ph type="sldImg"/>
+          </p:nvPr>
+        </p:nvSpPr>
+        <p:spPr/>
+      </p:sp>
+      <p:sp>
+        <p:nvSpPr>
+          <p:cNvPr id="3" name="Notes Placeholder 2"/>
+          <p:cNvSpPr>
+            <a:spLocks noGrp="1"/>
+          </p:cNvSpPr>
+          <p:nvPr>
+            <p:ph type="body" idx="1"/>
+          </p:nvPr>
+        </p:nvSpPr>
+        <p:spPr/>
+        <p:txBody>
+          <a:bodyPr/>
+          <a:lstStyle/>
+          <a:p>
+            <a:endParaRPr lang="en-US" dirty="0"/>
+          </a:p>
+        </p:txBody>
+      </p:sp>
+      <p:sp>
+        <p:nvSpPr>
+          <p:cNvPr id="4" name="Slide Number Placeholder 3"/>
+          <p:cNvSpPr>
+            <a:spLocks noGrp="1"/>
+          </p:cNvSpPr>
+          <p:nvPr>
+            <p:ph type="sldNum" sz="quarter" idx="10"/>
+          </p:nvPr>
+        </p:nvSpPr>
+        <p:spPr/>
+        <p:txBody>
+          <a:bodyPr/>
+          <a:lstStyle/>
+          <a:p>
+            <a:fld id="{F7021451-1387-4CA6-816F-3879F97B5CBC}" type="slidenum">
+              <a:rPr lang="en-US"/>
+              <a:t>3</a:t>
+            </a:fld>
+            <a:endParaRPr lang="en-US"/>
+          </a:p>
+        </p:txBody>
+      </p:sp>
+    </p:spTree>
+    <p:extLst>
+      <p:ext uri="{BB962C8B-B14F-4D97-AF65-F5344CB8AC3E}">
+        <p14:creationId xmlns:p14="http://schemas.microsoft.com/office/powerpoint/2010/main" val="1024086991"/>
+      </p:ext>
+    </p:extLst>
+  </p:cSld>
+  <p:clrMapOvr>
+    <a:masterClrMapping/>
+  </p:clrMapOvr>
+</p:notes>
+</file>
+
+<file path=ppt/notesSlides/notesSlide4.xml><?xml version="1.0" encoding="utf-8"?>
+<p:notes xmlns:a="http://schemas.openxmlformats.org/drawingml/2006/main" xmlns:r="http://schemas.openxmlformats.org/officeDocument/2006/relationships" xmlns:p="http://schemas.openxmlformats.org/presentationml/2006/main">
+  <p:cSld>
+    <p:spTree>
+      <p:nvGrpSpPr>
+        <p:cNvPr id="1" name=""/>
+        <p:cNvGrpSpPr/>
+        <p:nvPr/>
+      </p:nvGrpSpPr>
+      <p:grpSpPr>
+        <a:xfrm>
+          <a:off x="0" y="0"/>
+          <a:ext cx="0" cy="0"/>
+          <a:chOff x="0" y="0"/>
+          <a:chExt cx="0" cy="0"/>
+        </a:xfrm>
+      </p:grpSpPr>
+      <p:sp>
+        <p:nvSpPr>
+          <p:cNvPr id="2" name="Slide Image Placeholder 1"/>
+          <p:cNvSpPr>
+            <a:spLocks noGrp="1" noRot="1" noChangeAspect="1"/>
+          </p:cNvSpPr>
+          <p:nvPr>
+            <p:ph type="sldImg"/>
+          </p:nvPr>
+        </p:nvSpPr>
+        <p:spPr/>
+      </p:sp>
+      <p:sp>
+        <p:nvSpPr>
+          <p:cNvPr id="3" name="Notes Placeholder 2"/>
+          <p:cNvSpPr>
+            <a:spLocks noGrp="1"/>
+          </p:cNvSpPr>
+          <p:nvPr>
+            <p:ph type="body" idx="1"/>
+          </p:nvPr>
+        </p:nvSpPr>
+        <p:spPr/>
+        <p:txBody>
+          <a:bodyPr/>
+          <a:lstStyle/>
+          <a:p>
+            <a:endParaRPr lang="en-US" dirty="0"/>
+          </a:p>
+        </p:txBody>
+      </p:sp>
+      <p:sp>
+        <p:nvSpPr>
+          <p:cNvPr id="4" name="Slide Number Placeholder 3"/>
+          <p:cNvSpPr>
+            <a:spLocks noGrp="1"/>
+          </p:cNvSpPr>
+          <p:nvPr>
+            <p:ph type="sldNum" sz="quarter" idx="10"/>
+          </p:nvPr>
+        </p:nvSpPr>
+        <p:spPr/>
+        <p:txBody>
+          <a:bodyPr/>
+          <a:lstStyle/>
+          <a:p>
+            <a:fld id="{F7021451-1387-4CA6-816F-3879F97B5CBC}" type="slidenum">
+              <a:rPr lang="en-US"/>
+              <a:t>4</a:t>
+            </a:fld>
+            <a:endParaRPr lang="en-US"/>
+          </a:p>
+        </p:txBody>
+      </p:sp>
+    </p:spTree>
+    <p:extLst>
+      <p:ext uri="{BB962C8B-B14F-4D97-AF65-F5344CB8AC3E}">
+        <p14:creationId xmlns:p14="http://schemas.microsoft.com/office/powerpoint/2010/main" val="1024086991"/>
+      </p:ext>
+    </p:extLst>
+  </p:cSld>
+  <p:clrMapOvr>
+    <a:masterClrMapping/>
+  </p:clrMapOvr>
+</p:notes>
+</file>
+
+<file path=ppt/notesSlides/notesSlide5.xml><?xml version="1.0" encoding="utf-8"?>
+<p:notes xmlns:a="http://schemas.openxmlformats.org/drawingml/2006/main" xmlns:r="http://schemas.openxmlformats.org/officeDocument/2006/relationships" xmlns:p="http://schemas.openxmlformats.org/presentationml/2006/main">
+  <p:cSld>
+    <p:spTree>
+      <p:nvGrpSpPr>
+        <p:cNvPr id="1" name=""/>
+        <p:cNvGrpSpPr/>
+        <p:nvPr/>
+      </p:nvGrpSpPr>
+      <p:grpSpPr>
+        <a:xfrm>
+          <a:off x="0" y="0"/>
+          <a:ext cx="0" cy="0"/>
+          <a:chOff x="0" y="0"/>
+          <a:chExt cx="0" cy="0"/>
+        </a:xfrm>
+      </p:grpSpPr>
+      <p:sp>
+        <p:nvSpPr>
+          <p:cNvPr id="2" name="Slide Image Placeholder 1"/>
+          <p:cNvSpPr>
+            <a:spLocks noGrp="1" noRot="1" noChangeAspect="1"/>
+          </p:cNvSpPr>
+          <p:nvPr>
+            <p:ph type="sldImg"/>
+          </p:nvPr>
+        </p:nvSpPr>
+        <p:spPr/>
+      </p:sp>
+      <p:sp>
+        <p:nvSpPr>
+          <p:cNvPr id="3" name="Notes Placeholder 2"/>
+          <p:cNvSpPr>
+            <a:spLocks noGrp="1"/>
+          </p:cNvSpPr>
+          <p:nvPr>
+            <p:ph type="body" idx="1"/>
+          </p:nvPr>
+        </p:nvSpPr>
+        <p:spPr/>
+        <p:txBody>
+          <a:bodyPr/>
+          <a:lstStyle/>
+          <a:p>
+            <a:endParaRPr lang="en-US" dirty="0"/>
+          </a:p>
+        </p:txBody>
+      </p:sp>
+      <p:sp>
+        <p:nvSpPr>
+          <p:cNvPr id="4" name="Slide Number Placeholder 3"/>
+          <p:cNvSpPr>
+            <a:spLocks noGrp="1"/>
+          </p:cNvSpPr>
+          <p:nvPr>
+            <p:ph type="sldNum" sz="quarter" idx="10"/>
+          </p:nvPr>
+        </p:nvSpPr>
+        <p:spPr/>
+        <p:txBody>
+          <a:bodyPr/>
+          <a:lstStyle/>
+          <a:p>
+            <a:fld id="{F7021451-1387-4CA6-816F-3879F97B5CBC}" type="slidenum">
+              <a:rPr lang="en-US"/>
+              <a:t>5</a:t>
+            </a:fld>
+            <a:endParaRPr lang="en-US"/>
+          </a:p>
+        </p:txBody>
+      </p:sp>
+    </p:spTree>
+    <p:extLst>
+      <p:ext uri="{BB962C8B-B14F-4D97-AF65-F5344CB8AC3E}">
+        <p14:creationId xmlns:p14="http://schemas.microsoft.com/office/powerpoint/2010/main" val="1024086991"/>
+      </p:ext>
+    </p:extLst>
+  </p:cSld>
+  <p:clrMapOvr>
+    <a:masterClrMapping/>
+  </p:clrMapOvr>
+</p:notes>
+</file>
+
+<file path=ppt/notesSlides/notesSlide6.xml><?xml version="1.0" encoding="utf-8"?>
+<p:notes xmlns:a="http://schemas.openxmlformats.org/drawingml/2006/main" xmlns:r="http://schemas.openxmlformats.org/officeDocument/2006/relationships" xmlns:p="http://schemas.openxmlformats.org/presentationml/2006/main">
+  <p:cSld>
+    <p:spTree>
+      <p:nvGrpSpPr>
+        <p:cNvPr id="1" name=""/>
+        <p:cNvGrpSpPr/>
+        <p:nvPr/>
+      </p:nvGrpSpPr>
+      <p:grpSpPr>
+        <a:xfrm>
+          <a:off x="0" y="0"/>
+          <a:ext cx="0" cy="0"/>
+          <a:chOff x="0" y="0"/>
+          <a:chExt cx="0" cy="0"/>
+        </a:xfrm>
+      </p:grpSpPr>
+      <p:sp>
+        <p:nvSpPr>
+          <p:cNvPr id="2" name="Slide Image Placeholder 1"/>
+          <p:cNvSpPr>
+            <a:spLocks noGrp="1" noRot="1" noChangeAspect="1"/>
+          </p:cNvSpPr>
+          <p:nvPr>
+            <p:ph type="sldImg"/>
+          </p:nvPr>
+        </p:nvSpPr>
+        <p:spPr/>
+      </p:sp>
+      <p:sp>
+        <p:nvSpPr>
+          <p:cNvPr id="3" name="Notes Placeholder 2"/>
+          <p:cNvSpPr>
+            <a:spLocks noGrp="1"/>
+          </p:cNvSpPr>
+          <p:nvPr>
+            <p:ph type="body" idx="1"/>
+          </p:nvPr>
+        </p:nvSpPr>
+        <p:spPr/>
+        <p:txBody>
+          <a:bodyPr/>
+          <a:lstStyle/>
+          <a:p>
+            <a:endParaRPr lang="en-US" dirty="0"/>
+          </a:p>
+        </p:txBody>
+      </p:sp>
+      <p:sp>
+        <p:nvSpPr>
+          <p:cNvPr id="4" name="Slide Number Placeholder 3"/>
+          <p:cNvSpPr>
+            <a:spLocks noGrp="1"/>
+          </p:cNvSpPr>
+          <p:nvPr>
+            <p:ph type="sldNum" sz="quarter" idx="10"/>
+          </p:nvPr>
+        </p:nvSpPr>
+        <p:spPr/>
+        <p:txBody>
+          <a:bodyPr/>
+          <a:lstStyle/>
+          <a:p>
+            <a:fld id="{F7021451-1387-4CA6-816F-3879F97B5CBC}" type="slidenum">
+              <a:rPr lang="en-US"/>
+              <a:t>6</a:t>
+            </a:fld>
+            <a:endParaRPr lang="en-US"/>
+          </a:p>
+        </p:txBody>
+      </p:sp>
+    </p:spTree>
+    <p:extLst>
+      <p:ext uri="{BB962C8B-B14F-4D97-AF65-F5344CB8AC3E}">
+        <p14:creationId xmlns:p14="http://schemas.microsoft.com/office/powerpoint/2010/main" val="1024086991"/>
+      </p:ext>
+    </p:extLst>
+  </p:cSld>
+  <p:clrMapOvr>
+    <a:masterClrMapping/>
+  </p:clrMapOvr>
+</p:notes>
+</file>
+
+<file path=ppt/notesSlides/notesSlide7.xml><?xml version="1.0" encoding="utf-8"?>
+<p:notes xmlns:a="http://schemas.openxmlformats.org/drawingml/2006/main" xmlns:r="http://schemas.openxmlformats.org/officeDocument/2006/relationships" xmlns:p="http://schemas.openxmlformats.org/presentationml/2006/main">
+  <p:cSld>
+    <p:spTree>
+      <p:nvGrpSpPr>
+        <p:cNvPr id="1" name=""/>
+        <p:cNvGrpSpPr/>
+        <p:nvPr/>
+      </p:nvGrpSpPr>
+      <p:grpSpPr>
+        <a:xfrm>
+          <a:off x="0" y="0"/>
+          <a:ext cx="0" cy="0"/>
+          <a:chOff x="0" y="0"/>
+          <a:chExt cx="0" cy="0"/>
+        </a:xfrm>
+      </p:grpSpPr>
+      <p:sp>
+        <p:nvSpPr>
+          <p:cNvPr id="2" name="Slide Image Placeholder 1"/>
+          <p:cNvSpPr>
+            <a:spLocks noGrp="1" noRot="1" noChangeAspect="1"/>
+          </p:cNvSpPr>
+          <p:nvPr>
+            <p:ph type="sldImg"/>
+          </p:nvPr>
+        </p:nvSpPr>
+        <p:spPr/>
+      </p:sp>
+      <p:sp>
+        <p:nvSpPr>
+          <p:cNvPr id="3" name="Notes Placeholder 2"/>
+          <p:cNvSpPr>
+            <a:spLocks noGrp="1"/>
+          </p:cNvSpPr>
+          <p:nvPr>
+            <p:ph type="body" idx="1"/>
+          </p:nvPr>
+        </p:nvSpPr>
+        <p:spPr/>
+        <p:txBody>
+          <a:bodyPr/>
+          <a:lstStyle/>
+          <a:p>
+            <a:endParaRPr lang="en-US" dirty="0"/>
+          </a:p>
+        </p:txBody>
+      </p:sp>
+      <p:sp>
+        <p:nvSpPr>
+          <p:cNvPr id="4" name="Slide Number Placeholder 3"/>
+          <p:cNvSpPr>
+            <a:spLocks noGrp="1"/>
+          </p:cNvSpPr>
+          <p:nvPr>
+            <p:ph type="sldNum" sz="quarter" idx="10"/>
+          </p:nvPr>
+        </p:nvSpPr>
+        <p:spPr/>
+        <p:txBody>
+          <a:bodyPr/>
+          <a:lstStyle/>
+          <a:p>
+            <a:fld id="{F7021451-1387-4CA6-816F-3879F97B5CBC}" type="slidenum">
+              <a:rPr lang="en-US"/>
+              <a:t>7</a:t>
+            </a:fld>
+            <a:endParaRPr lang="en-US"/>
+          </a:p>
+        </p:txBody>
+      </p:sp>
+    </p:spTree>
+    <p:extLst>
+      <p:ext uri="{BB962C8B-B14F-4D97-AF65-F5344CB8AC3E}">
+        <p14:creationId xmlns:p14="http://schemas.microsoft.com/office/powerpoint/2010/main" val="1024086991"/>
+      </p:ext>
+    </p:extLst>
+  </p:cSld>
+  <p:clrMapOvr>
+    <a:masterClrMapping/>
+  </p:clrMapOvr>
+</p:notes>
+</file>
+
+<file path=ppt/notesSlides/notesSlide8.xml><?xml version="1.0" encoding="utf-8"?>
+<p:notes xmlns:a="http://schemas.openxmlformats.org/drawingml/2006/main" xmlns:r="http://schemas.openxmlformats.org/officeDocument/2006/relationships" xmlns:p="http://schemas.openxmlformats.org/presentationml/2006/main">
+  <p:cSld>
+    <p:spTree>
+      <p:nvGrpSpPr>
+        <p:cNvPr id="1" name=""/>
+        <p:cNvGrpSpPr/>
+        <p:nvPr/>
+      </p:nvGrpSpPr>
+      <p:grpSpPr>
+        <a:xfrm>
+          <a:off x="0" y="0"/>
+          <a:ext cx="0" cy="0"/>
+          <a:chOff x="0" y="0"/>
+          <a:chExt cx="0" cy="0"/>
+        </a:xfrm>
+      </p:grpSpPr>
+      <p:sp>
+        <p:nvSpPr>
+          <p:cNvPr id="2" name="Slide Image Placeholder 1"/>
+          <p:cNvSpPr>
+            <a:spLocks noGrp="1" noRot="1" noChangeAspect="1"/>
+          </p:cNvSpPr>
+          <p:nvPr>
+            <p:ph type="sldImg"/>
+          </p:nvPr>
+        </p:nvSpPr>
+        <p:spPr/>
+      </p:sp>
+      <p:sp>
+        <p:nvSpPr>
+          <p:cNvPr id="3" name="Notes Placeholder 2"/>
+          <p:cNvSpPr>
+            <a:spLocks noGrp="1"/>
+          </p:cNvSpPr>
+          <p:nvPr>
+            <p:ph type="body" idx="1"/>
+          </p:nvPr>
+        </p:nvSpPr>
+        <p:spPr/>
+        <p:txBody>
+          <a:bodyPr/>
+          <a:lstStyle/>
+          <a:p>
+            <a:endParaRPr lang="en-US" dirty="0"/>
+          </a:p>
+        </p:txBody>
+      </p:sp>
+      <p:sp>
+        <p:nvSpPr>
+          <p:cNvPr id="4" name="Slide Number Placeholder 3"/>
+          <p:cNvSpPr>
+            <a:spLocks noGrp="1"/>
+          </p:cNvSpPr>
+          <p:nvPr>
+            <p:ph type="sldNum" sz="quarter" idx="10"/>
+          </p:nvPr>
+        </p:nvSpPr>
+        <p:spPr/>
+        <p:txBody>
+          <a:bodyPr/>
+          <a:lstStyle/>
+          <a:p>
+            <a:fld id="{F7021451-1387-4CA6-816F-3879F97B5CBC}" type="slidenum">
+              <a:rPr lang="en-US"/>
+              <a:t>8</a:t>
+            </a:fld>
+            <a:endParaRPr lang="en-US"/>
+          </a:p>
+        </p:txBody>
+      </p:sp>
+    </p:spTree>
+    <p:extLst>
+      <p:ext uri="{BB962C8B-B14F-4D97-AF65-F5344CB8AC3E}">
+        <p14:creationId xmlns:p14="http://schemas.microsoft.com/office/powerpoint/2010/main" val="1024086991"/>
+      </p:ext>
+    </p:extLst>
+  </p:cSld>
+  <p:clrMapOvr>
+    <a:masterClrMapping/>
+  </p:clrMapOvr>
+</p:notes>
+</file>
+
+<file path=ppt/notesSlides/notesSlide9.xml><?xml version="1.0" encoding="utf-8"?>
+<p:notes xmlns:a="http://schemas.openxmlformats.org/drawingml/2006/main" xmlns:r="http://schemas.openxmlformats.org/officeDocument/2006/relationships" xmlns:p="http://schemas.openxmlformats.org/presentationml/2006/main">
+  <p:cSld>
+    <p:spTree>
+      <p:nvGrpSpPr>
+        <p:cNvPr id="1" name=""/>
+        <p:cNvGrpSpPr/>
+        <p:nvPr/>
+      </p:nvGrpSpPr>
+      <p:grpSpPr>
+        <a:xfrm>
+          <a:off x="0" y="0"/>
+          <a:ext cx="0" cy="0"/>
+          <a:chOff x="0" y="0"/>
+          <a:chExt cx="0" cy="0"/>
+        </a:xfrm>
+      </p:grpSpPr>
+      <p:sp>
+        <p:nvSpPr>
+          <p:cNvPr id="2" name="Slide Image Placeholder 1"/>
+          <p:cNvSpPr>
+            <a:spLocks noGrp="1" noRot="1" noChangeAspect="1"/>
+          </p:cNvSpPr>
+          <p:nvPr>
+            <p:ph type="sldImg"/>
+          </p:nvPr>
+        </p:nvSpPr>
+        <p:spPr/>
+      </p:sp>
+      <p:sp>
+        <p:nvSpPr>
+          <p:cNvPr id="3" name="Notes Placeholder 2"/>
+          <p:cNvSpPr>
+            <a:spLocks noGrp="1"/>
+          </p:cNvSpPr>
+          <p:nvPr>
+            <p:ph type="body" idx="1"/>
+          </p:nvPr>
+        </p:nvSpPr>
+        <p:spPr/>
+        <p:txBody>
+          <a:bodyPr/>
+          <a:lstStyle/>
+          <a:p>
+            <a:endParaRPr lang="en-US" dirty="0"/>
+          </a:p>
+        </p:txBody>
+      </p:sp>
+      <p:sp>
+        <p:nvSpPr>
+          <p:cNvPr id="4" name="Slide Number Placeholder 3"/>
+          <p:cNvSpPr>
+            <a:spLocks noGrp="1"/>
+          </p:cNvSpPr>
+          <p:nvPr>
+            <p:ph type="sldNum" sz="quarter" idx="10"/>
+          </p:nvPr>
+        </p:nvSpPr>
+        <p:spPr/>
+        <p:txBody>
+          <a:bodyPr/>
+          <a:lstStyle/>
+          <a:p>
+            <a:fld id="{F7021451-1387-4CA6-816F-3879F97B5CBC}" type="slidenum">
+              <a:rPr lang="en-US"/>
+              <a:t>9</a:t>
+            </a:fld>
+            <a:endParaRPr lang="en-US"/>
+          </a:p>
+        </p:txBody>
+      </p:sp>
+    </p:spTree>
+    <p:extLst>
+      <p:ext uri="{BB962C8B-B14F-4D97-AF65-F5344CB8AC3E}">
+        <p14:creationId xmlns:p14="http://schemas.microsoft.com/office/powerpoint/2010/main" val="1024086991"/>
+      </p:ext>
+    </p:extLst>
+  </p:cSld>
+  <p:clrMapOvr>
+    <a:masterClrMapping/>
+  </p:clrMapOvr>
+</p:notes>
 </file>
 
 <file path=ppt/slideLayouts/slideLayout1.xml><?xml version="1.0" encoding="utf-8"?>
@@ -646,7 +1486,7 @@
           <p:nvPr/>
         </p:nvPicPr>
         <p:blipFill>
-          <a:blip r:embed="rId2"/>
+          <a:blip r:embed="rId3"/>
           <a:stretch>
             <a:fillRect/>
           </a:stretch>
@@ -844,6 +1684,45 @@
               <a:t>dotnetclaude.com</a:t>
             </a:r>
             <a:endParaRPr lang="en-US" sz="1600" dirty="0"/>
+          </a:p>
+        </p:txBody>
+      </p:sp>
+      <p:sp>
+        <p:nvSpPr>
+          <p:cNvPr id="10" name="Text 7"/>
+          <p:cNvSpPr/>
+          <p:nvPr/>
+        </p:nvSpPr>
+        <p:spPr>
+          <a:xfrm>
+            <a:off x="640080" y="4443984"/>
+            <a:ext cx="8046720" cy="292608"/>
+          </a:xfrm>
+          <a:prstGeom prst="rect">
+            <a:avLst/>
+          </a:prstGeom>
+          <a:noFill/>
+          <a:ln/>
+        </p:spPr>
+        <p:txBody>
+          <a:bodyPr wrap="square" lIns="0" tIns="0" rIns="0" bIns="0" rtlCol="0" anchor="ctr"/>
+          <a:lstStyle/>
+          <a:p>
+            <a:pPr marL="0" indent="0">
+              <a:buNone/>
+            </a:pPr>
+            <a:r>
+              <a:rPr lang="en-US" sz="1000" i="1" dirty="0">
+                <a:solidFill>
+                  <a:srgbClr val="615C52"/>
+                </a:solidFill>
+                <a:latin typeface="Inter" pitchFamily="34" charset="0"/>
+                <a:ea typeface="Inter" pitchFamily="34" charset="-122"/>
+                <a:cs typeface="Inter" pitchFamily="34" charset="-120"/>
+              </a:rPr>
+              <a:t>Instructor-led workshop for professional .NET developers</a:t>
+            </a:r>
+            <a:endParaRPr lang="en-US" sz="1000" dirty="0"/>
           </a:p>
         </p:txBody>
       </p:sp>
@@ -1035,7 +1914,7 @@
           <p:nvPr/>
         </p:nvPicPr>
         <p:blipFill>
-          <a:blip r:embed="rId2"/>
+          <a:blip r:embed="rId3"/>
           <a:stretch>
             <a:fillRect/>
           </a:stretch>
@@ -1244,7 +2123,7 @@
           <p:nvPr/>
         </p:nvPicPr>
         <p:blipFill>
-          <a:blip r:embed="rId3"/>
+          <a:blip r:embed="rId4"/>
           <a:stretch>
             <a:fillRect/>
           </a:stretch>
@@ -1453,7 +2332,7 @@
           <p:nvPr/>
         </p:nvPicPr>
         <p:blipFill>
-          <a:blip r:embed="rId4"/>
+          <a:blip r:embed="rId5"/>
           <a:stretch>
             <a:fillRect/>
           </a:stretch>
@@ -1810,7 +2689,7 @@
           <p:nvPr/>
         </p:nvPicPr>
         <p:blipFill>
-          <a:blip r:embed="rId2"/>
+          <a:blip r:embed="rId3"/>
           <a:stretch>
             <a:fillRect/>
           </a:stretch>
@@ -2050,6 +2929,45 @@
               <a:t>Day 1  ·  2/10</a:t>
             </a:r>
             <a:endParaRPr lang="en-US" sz="900" dirty="0"/>
+          </a:p>
+        </p:txBody>
+      </p:sp>
+      <p:sp>
+        <p:nvSpPr>
+          <p:cNvPr id="11" name="Text 8"/>
+          <p:cNvSpPr/>
+          <p:nvPr/>
+        </p:nvSpPr>
+        <p:spPr>
+          <a:xfrm>
+            <a:off x="548640" y="4443984"/>
+            <a:ext cx="8046720" cy="292608"/>
+          </a:xfrm>
+          <a:prstGeom prst="rect">
+            <a:avLst/>
+          </a:prstGeom>
+          <a:noFill/>
+          <a:ln/>
+        </p:spPr>
+        <p:txBody>
+          <a:bodyPr wrap="square" lIns="0" tIns="0" rIns="0" bIns="0" rtlCol="0" anchor="ctr"/>
+          <a:lstStyle/>
+          <a:p>
+            <a:pPr marL="0" indent="0">
+              <a:buNone/>
+            </a:pPr>
+            <a:r>
+              <a:rPr lang="en-US" sz="1000" i="1" dirty="0">
+                <a:solidFill>
+                  <a:srgbClr val="615C52"/>
+                </a:solidFill>
+                <a:latin typeface="Inter" pitchFamily="34" charset="0"/>
+                <a:ea typeface="Inter" pitchFamily="34" charset="-122"/>
+                <a:cs typeface="Inter" pitchFamily="34" charset="-120"/>
+              </a:rPr>
+              <a:t>▸ Set the tone: this is about habit change, not a feature tour.</a:t>
+            </a:r>
+            <a:endParaRPr lang="en-US" sz="1000" dirty="0"/>
           </a:p>
         </p:txBody>
       </p:sp>
@@ -4804,7 +5722,7 @@
           <p:nvPr/>
         </p:nvPicPr>
         <p:blipFill>
-          <a:blip r:embed="rId2"/>
+          <a:blip r:embed="rId3"/>
           <a:stretch>
             <a:fillRect/>
           </a:stretch>
@@ -5937,7 +6855,7 @@
           <p:nvPr/>
         </p:nvPicPr>
         <p:blipFill>
-          <a:blip r:embed="rId2"/>
+          <a:blip r:embed="rId3"/>
           <a:stretch>
             <a:fillRect/>
           </a:stretch>
@@ -6100,7 +7018,7 @@
           <p:nvPr/>
         </p:nvPicPr>
         <p:blipFill>
-          <a:blip r:embed="rId3"/>
+          <a:blip r:embed="rId4"/>
           <a:stretch>
             <a:fillRect/>
           </a:stretch>
@@ -6263,7 +7181,7 @@
           <p:nvPr/>
         </p:nvPicPr>
         <p:blipFill>
-          <a:blip r:embed="rId4"/>
+          <a:blip r:embed="rId5"/>
           <a:stretch>
             <a:fillRect/>
           </a:stretch>
@@ -6426,7 +7344,7 @@
           <p:nvPr/>
         </p:nvPicPr>
         <p:blipFill>
-          <a:blip r:embed="rId5"/>
+          <a:blip r:embed="rId6"/>
           <a:stretch>
             <a:fillRect/>
           </a:stretch>
@@ -6589,7 +7507,7 @@
           <p:nvPr/>
         </p:nvPicPr>
         <p:blipFill>
-          <a:blip r:embed="rId6"/>
+          <a:blip r:embed="rId7"/>
           <a:stretch>
             <a:fillRect/>
           </a:stretch>
@@ -6637,7 +7555,7 @@
                 <a:ea typeface="Inter" pitchFamily="34" charset="-122"/>
                 <a:cs typeface="Inter" pitchFamily="34" charset="-120"/>
               </a:rPr>
-              <a:t>VS Code</a:t>
+              <a:t>VS Code/JetBrains Rider</a:t>
             </a:r>
             <a:endParaRPr lang="en-US" sz="1500" dirty="0"/>
           </a:p>
@@ -6676,7 +7594,7 @@
                 <a:ea typeface="Inter" pitchFamily="34" charset="-122"/>
                 <a:cs typeface="Inter" pitchFamily="34" charset="-120"/>
               </a:rPr>
-              <a:t>Primary editor for the IDE labs</a:t>
+              <a:t>Primary editors for the IDE labs</a:t>
             </a:r>
             <a:endParaRPr lang="en-US" sz="1300" dirty="0"/>
           </a:p>
@@ -7466,7 +8384,7 @@
           <p:nvPr/>
         </p:nvPicPr>
         <p:blipFill>
-          <a:blip r:embed="rId2"/>
+          <a:blip r:embed="rId3"/>
           <a:stretch>
             <a:fillRect/>
           </a:stretch>
@@ -8504,27 +9422,7 @@
                 <a:ea typeface="Courier New" pitchFamily="34" charset="-122"/>
                 <a:cs typeface="Courier New" pitchFamily="34" charset="-120"/>
               </a:rPr>
-              <a:t>├─ BookTracker.Tests/</a:t>
-            </a:r>
-            <a:endParaRPr lang="en-US" sz="1500" dirty="0"/>
-          </a:p>
-          <a:p>
-            <a:pPr marL="0" indent="0">
-              <a:lnSpc>
-                <a:spcPct val="130000"/>
-              </a:lnSpc>
-              <a:buNone/>
-            </a:pPr>
-            <a:r>
-              <a:rPr lang="en-US" sz="1500" dirty="0">
-                <a:solidFill>
-                  <a:srgbClr val="E0A04A"/>
-                </a:solidFill>
-                <a:latin typeface="Courier New" pitchFamily="34" charset="0"/>
-                <a:ea typeface="Courier New" pitchFamily="34" charset="-122"/>
-                <a:cs typeface="Courier New" pitchFamily="34" charset="-120"/>
-              </a:rPr>
-              <a:t>└─ CLAUDE.md</a:t>
+              <a:t>└─ BookTracker.Tests/</a:t>
             </a:r>
             <a:endParaRPr lang="en-US" sz="1500" dirty="0"/>
           </a:p>
@@ -8972,7 +9870,7 @@
                 <a:ea typeface="Inter" pitchFamily="34" charset="-122"/>
                 <a:cs typeface="Inter" pitchFamily="34" charset="-120"/>
               </a:rPr>
-              <a:t>CLAUDE.md starts minimal on purpose — you'll grow it as the day goes on.</a:t>
+              <a:t>You create CLAUDE.md in Lab 1 — it's the day's first deliverable.</a:t>
             </a:r>
             <a:endParaRPr lang="en-US" sz="1300" dirty="0"/>
           </a:p>
